--- a/Blessed Be You Name-CH.pptx
+++ b/Blessed Be You Name-CH.pptx
@@ -4702,7 +4702,7 @@
                 <a:latin typeface="Avenir Medium" panose="02000503020000020003" pitchFamily="2" charset="0"/>
                 <a:ea typeface="Bodoni Ornaments" pitchFamily="2" charset="0"/>
               </a:rPr>
-              <a:t>G                   D </a:t>
+              <a:t>                         G                   D </a:t>
             </a:r>
           </a:p>
           <a:p>
